--- a/public/fun/pack/pptx/familypro/가족소개프리미엄_46_우리부부_로즈쿼츠.pptx
+++ b/public/fun/pack/pptx/familypro/가족소개프리미엄_46_우리부부_로즈쿼츠.pptx
@@ -113,12 +113,12 @@
   <p:extLst>
     <p:ext uri="{521415D9-36F7-43E2-AB2F-B90AF26B5E84}">
       <p14:sectionLst xmlns:p14="http://schemas.microsoft.com/office/powerpoint/2010/main">
-        <p14:section name="시작" id="{83C2F670-BB79-43F9-92AA-0296AB61C5BD}">
+        <p14:section name="시작" id="{6FF1DE5F-B936-4A90-AC9D-AD0445DBEE11}">
           <p14:sldIdLst>
             <p14:sldId id="256"/>
           </p14:sldIdLst>
         </p14:section>
-        <p14:section name="본문" id="{BA57746B-1C0C-4408-8EE5-8E0AF6A04160}">
+        <p14:section name="본문" id="{9BEFA8DD-AB00-4312-801D-AA3F366BB659}">
           <p14:sldIdLst>
             <p14:sldId id="257"/>
             <p14:sldId id="258"/>
@@ -127,7 +127,7 @@
             <p14:sldId id="261"/>
           </p14:sldIdLst>
         </p14:section>
-        <p14:section name="마무리" id="{B03E7409-E9DB-42B1-906E-B4B09B9E86BD}">
+        <p14:section name="마무리" id="{7CF6CDB9-E928-4091-B2EF-E17B85A45271}">
           <p14:sldIdLst>
             <p14:sldId id="262"/>
           </p14:sldIdLst>
@@ -1464,7 +1464,7 @@
             </a:lvl1pPr>
           </a:lstStyle>
           <a:p>
-            <a:fld id="{237E8FEB-D72A-42EE-B99D-559F474B083A}" type="slidenum">
+            <a:fld id="{1FB72BE8-A8AD-4674-8FD5-D553A5687641}" type="slidenum">
               <a:rPr lang="en-US"/>
               <a:t>‹#›</a:t>
             </a:fld>
@@ -1996,7 +1996,7 @@
             </a:lvl1pPr>
           </a:lstStyle>
           <a:p>
-            <a:fld id="{61B8D071-5596-4E60-BB82-6D428793CD13}" type="slidenum">
+            <a:fld id="{AB94310C-1C8D-4955-AC09-DE99F99AD838}" type="slidenum">
               <a:rPr lang="en-US"/>
               <a:t>‹#›</a:t>
             </a:fld>
@@ -2585,7 +2585,7 @@
             </a:lvl1pPr>
           </a:lstStyle>
           <a:p>
-            <a:fld id="{5A03AA84-C12E-4CAB-B776-FFEED3154A6B}" type="slidenum">
+            <a:fld id="{549FC129-0964-4B7A-A1D4-A3BFD04533FB}" type="slidenum">
               <a:rPr lang="en-US"/>
               <a:t>‹#›</a:t>
             </a:fld>
@@ -3388,7 +3388,7 @@
           <a:p>
             <a:r>
               <a:rPr lang="ko-KR"/>
-              <a:t>우리 부부 · 0000. 00. 00</a:t>
+              <a:t>우리 부부 · 날짜 입력</a:t>
             </a:r>
           </a:p>
         </p:txBody>
@@ -3611,7 +3611,7 @@
           <a:bodyPr/>
           <a:lstStyle/>
           <a:p>
-            <a:fld id="{7B7DA5E8-24F6-418A-8927-2AB2E47ABF9E}" type="slidenum">
+            <a:fld id="{7476EB4D-4A71-472C-85E4-0B232B5F2C7F}" type="slidenum">
               <a:rPr lang="en-US"/>
               <a:t>‹#›</a:t>
             </a:fld>
@@ -4055,7 +4055,7 @@
           <a:bodyPr/>
           <a:lstStyle/>
           <a:p>
-            <a:fld id="{91D118C6-A05C-4D10-8ACC-12AAED75F68C}" type="slidenum">
+            <a:fld id="{881453EE-0AB0-43AD-B087-229A17D8AC69}" type="slidenum">
               <a:rPr lang="en-US"/>
               <a:t>‹#›</a:t>
             </a:fld>
@@ -5030,7 +5030,7 @@
           <a:bodyPr/>
           <a:lstStyle/>
           <a:p>
-            <a:fld id="{CF525C67-075C-4CE8-BBDD-1A839AA97D67}" type="slidenum">
+            <a:fld id="{7CE471E2-7E18-4C67-9642-3D597E2C4A9E}" type="slidenum">
               <a:rPr lang="en-US"/>
               <a:t>‹#›</a:t>
             </a:fld>
@@ -6426,7 +6426,7 @@
           <a:bodyPr/>
           <a:lstStyle/>
           <a:p>
-            <a:fld id="{A9988EDA-50FD-46CB-85A6-27AC2B31C5B9}" type="slidenum">
+            <a:fld id="{3A54F91E-FB01-4814-AC1B-5F29ACAB5AC1}" type="slidenum">
               <a:rPr lang="en-US"/>
               <a:t>‹#›</a:t>
             </a:fld>
@@ -6514,7 +6514,7 @@
           <a:bodyPr/>
           <a:lstStyle/>
           <a:p>
-            <a:fld id="{36CEA6F7-DA1C-4220-A84C-1A177B950AA6}" type="slidenum">
+            <a:fld id="{2131C69E-3662-4B4F-A8B8-802B60DFE276}" type="slidenum">
               <a:rPr lang="en-US"/>
               <a:t>‹#›</a:t>
             </a:fld>
